--- a/WEEK_3_Day_17_Method_Comparison.pptx
+++ b/WEEK_3_Day_17_Method_Comparison.pptx
@@ -3388,6 +3388,44 @@
           </a:graphicData>
         </a:graphic>
       </p:graphicFrame>
+      <p:sp>
+        <p:nvSpPr>
+          <p:cNvPr id="4" name="TextBox 3"/>
+          <p:cNvSpPr txBox="1"/>
+          <p:nvPr/>
+        </p:nvSpPr>
+        <p:spPr>
+          <a:xfrm>
+            <a:off x="457200" y="182880"/>
+            <a:ext cx="4572000" cy="914400"/>
+          </a:xfrm>
+          <a:prstGeom prst="rect">
+            <a:avLst/>
+          </a:prstGeom>
+          <a:noFill/>
+        </p:spPr>
+        <p:txBody>
+          <a:bodyPr wrap="none">
+            <a:spAutoFit/>
+          </a:bodyPr>
+          <a:lstStyle/>
+          <a:p>
+            <a:r>
+              <a:t>Name: K.Santhosh Reddy</a:t>
+            </a:r>
+          </a:p>
+          <a:p>
+            <a:r>
+              <a:t>Cohort: 4 Batch A2</a:t>
+            </a:r>
+          </a:p>
+          <a:p>
+            <a:r>
+              <a:t>Mentor: Mr. Vamshi</a:t>
+            </a:r>
+          </a:p>
+        </p:txBody>
+      </p:sp>
     </p:spTree>
   </p:cSld>
   <p:clrMapOvr>

--- a/WEEK_3_Day_17_Method_Comparison.pptx
+++ b/WEEK_3_Day_17_Method_Comparison.pptx
@@ -8,6 +8,7 @@
     <p:sldId id="256" r:id="rId7"/>
     <p:sldId id="257" r:id="rId8"/>
     <p:sldId id="258" r:id="rId9"/>
+    <p:sldId id="259" r:id="rId10"/>
   </p:sldIdLst>
   <p:sldSz cx="9144000" cy="6858000" type="screen4x3"/>
   <p:notesSz cx="6858000" cy="9144000"/>
@@ -3106,6 +3107,9 @@
           <a:lstStyle/>
           <a:p>
             <a:r>
+              <a:rPr>
+                <a:latin typeface="Times New Roman"/>
+              </a:rPr>
               <a:t>Method Comparison (Static vs Adaptive vs Dynamic Phase)</a:t>
             </a:r>
           </a:p>
@@ -3409,21 +3413,7 @@
             <a:spAutoFit/>
           </a:bodyPr>
           <a:lstStyle/>
-          <a:p>
-            <a:r>
-              <a:t>Name: K.Santhosh Reddy</a:t>
-            </a:r>
-          </a:p>
-          <a:p>
-            <a:r>
-              <a:t>Cohort: 4 Batch A2</a:t>
-            </a:r>
-          </a:p>
-          <a:p>
-            <a:r>
-              <a:t>Mentor: Mr. Vamshi</a:t>
-            </a:r>
-          </a:p>
+          <a:p/>
         </p:txBody>
       </p:sp>
     </p:spTree>
@@ -3460,6 +3450,9 @@
           <a:lstStyle/>
           <a:p>
             <a:r>
+              <a:rPr>
+                <a:latin typeface="Times New Roman"/>
+              </a:rPr>
               <a:t>Discussion: Overfitting, Limitations &amp; Failures</a:t>
             </a:r>
           </a:p>
@@ -3481,21 +3474,33 @@
           <a:lstStyle/>
           <a:p>
             <a:r>
+              <a:rPr>
+                <a:latin typeface="Times New Roman"/>
+              </a:rPr>
               <a:t>• Overfitting: Tuning the threshold window size (50 frames) heavily to the 1LED video might overfit to its specific lighting drift.</a:t>
             </a:r>
           </a:p>
           <a:p>
             <a:r>
+              <a:rPr>
+                <a:latin typeface="Times New Roman"/>
+              </a:rPr>
               <a:t>• Data Limitations: Lack of an explicit ground_truth.csv means BER is estimated via internal consistency rather than exact bit matches.</a:t>
             </a:r>
           </a:p>
           <a:p>
             <a:r>
+              <a:rPr>
+                <a:latin typeface="Times New Roman"/>
+              </a:rPr>
               <a:t>• Complexity: Dynamic phase snapping adds O(N) lookahead searches per frame, increasing processing time compared to static sampling.</a:t>
             </a:r>
           </a:p>
           <a:p>
             <a:r>
+              <a:rPr>
+                <a:latin typeface="Times New Roman"/>
+              </a:rPr>
               <a:t>• Failure Patterns: Blurring from rapid camera motion causes missed zero-crossings, forcing the decoder to dead-reckon.</a:t>
             </a:r>
           </a:p>
@@ -3535,6 +3540,9 @@
           <a:lstStyle/>
           <a:p>
             <a:r>
+              <a:rPr>
+                <a:latin typeface="Times New Roman"/>
+              </a:rPr>
               <a:t>Shortlisted Candidates for Deeper Experiments</a:t>
             </a:r>
           </a:p>
@@ -3556,28 +3564,141 @@
           <a:lstStyle/>
           <a:p>
             <a:r>
+              <a:rPr>
+                <a:latin typeface="Times New Roman"/>
+              </a:rPr>
               <a:t>Candidate 1: Dynamic Sync Decoder (Adaptive Threshold + Zero-Cross Snapping)</a:t>
             </a:r>
           </a:p>
           <a:p>
             <a:r>
+              <a:rPr>
+                <a:latin typeface="Times New Roman"/>
+              </a:rPr>
               <a:t> - Rationale: Only method currently capable of extracting 10,000+ stable bits from the drifting 1LED video.</a:t>
             </a:r>
           </a:p>
           <a:p/>
           <a:p>
             <a:r>
+              <a:rPr>
+                <a:latin typeface="Times New Roman"/>
+              </a:rPr>
               <a:t>Future Enhancements for Candidate:</a:t>
             </a:r>
           </a:p>
           <a:p>
             <a:r>
+              <a:rPr>
+                <a:latin typeface="Times New Roman"/>
+              </a:rPr>
               <a:t> - Implement a Phase-Locked Loop (PLL) to handle missed zero-crossings gracefully instead of dead-reckoning.</a:t>
             </a:r>
           </a:p>
           <a:p>
             <a:r>
+              <a:rPr>
+                <a:latin typeface="Times New Roman"/>
+              </a:rPr>
               <a:t> - Test multi-channel (RGB) thresholding rather than pure grayscale intensity to improve resilience against color temperature changes.</a:t>
+            </a:r>
+          </a:p>
+        </p:txBody>
+      </p:sp>
+    </p:spTree>
+  </p:cSld>
+  <p:clrMapOvr>
+    <a:masterClrMapping/>
+  </p:clrMapOvr>
+</p:sld>
+</file>
+
+<file path=ppt/slides/slide4.xml><?xml version="1.0" encoding="utf-8"?>
+<p:sld xmlns:a="http://schemas.openxmlformats.org/drawingml/2006/main" xmlns:p="http://schemas.openxmlformats.org/presentationml/2006/main" xmlns:r="http://schemas.openxmlformats.org/officeDocument/2006/relationships">
+  <p:cSld>
+    <p:spTree>
+      <p:nvGrpSpPr>
+        <p:cNvPr id="1" name=""/>
+        <p:cNvGrpSpPr/>
+        <p:nvPr/>
+      </p:nvGrpSpPr>
+      <p:grpSpPr/>
+      <p:sp>
+        <p:nvSpPr>
+          <p:cNvPr id="2" name="Title 1"/>
+          <p:cNvSpPr>
+            <a:spLocks noGrp="1"/>
+          </p:cNvSpPr>
+          <p:nvPr>
+            <p:ph type="title"/>
+          </p:nvPr>
+        </p:nvSpPr>
+        <p:spPr/>
+        <p:txBody>
+          <a:bodyPr/>
+          <a:lstStyle/>
+          <a:p>
+            <a:r>
+              <a:rPr>
+                <a:latin typeface="Times New Roman"/>
+              </a:rPr>
+              <a:t>Project Details</a:t>
+            </a:r>
+          </a:p>
+        </p:txBody>
+      </p:sp>
+      <p:sp>
+        <p:nvSpPr>
+          <p:cNvPr id="3" name="Content Placeholder 2"/>
+          <p:cNvSpPr>
+            <a:spLocks noGrp="1"/>
+          </p:cNvSpPr>
+          <p:nvPr>
+            <p:ph idx="1"/>
+          </p:nvPr>
+        </p:nvSpPr>
+        <p:spPr/>
+        <p:txBody>
+          <a:bodyPr/>
+          <a:lstStyle/>
+          <a:p/>
+          <a:p>
+            <a:pPr>
+              <a:spcAft>
+                <a:spcPts val="1400"/>
+              </a:spcAft>
+            </a:pPr>
+            <a:r>
+              <a:rPr sz="2800">
+                <a:latin typeface="Times New Roman"/>
+              </a:rPr>
+              <a:t>Name: K.Santhosh Reddy</a:t>
+            </a:r>
+          </a:p>
+          <a:p>
+            <a:pPr>
+              <a:spcAft>
+                <a:spcPts val="1400"/>
+              </a:spcAft>
+            </a:pPr>
+            <a:r>
+              <a:rPr sz="2800">
+                <a:latin typeface="Times New Roman"/>
+              </a:rPr>
+              <a:t>Cohort: 4 Batch A2</a:t>
+            </a:r>
+          </a:p>
+          <a:p>
+            <a:pPr>
+              <a:spcAft>
+                <a:spcPts val="1400"/>
+              </a:spcAft>
+            </a:pPr>
+            <a:r>
+              <a:rPr sz="2800">
+                <a:latin typeface="Times New Roman"/>
+              </a:rPr>
+              <a:t>Mentor: Mr. Vamshi</a:t>
             </a:r>
           </a:p>
         </p:txBody>

--- a/WEEK_3_Day_17_Method_Comparison.pptx
+++ b/WEEK_3_Day_17_Method_Comparison.pptx
@@ -5,6 +5,7 @@
     <p:sldMasterId id="2147483648" r:id="rId1"/>
   </p:sldMasterIdLst>
   <p:sldIdLst>
+    <p:sldId id="259" r:id="rId10"/>
     <p:sldId id="256" r:id="rId7"/>
     <p:sldId id="257" r:id="rId8"/>
     <p:sldId id="258" r:id="rId9"/>
@@ -3106,6 +3107,9 @@
           <a:lstStyle/>
           <a:p>
             <a:r>
+              <a:rPr>
+                <a:latin typeface="Times New Roman"/>
+              </a:rPr>
               <a:t>Method Comparison (Static vs Adaptive vs Dynamic Phase)</a:t>
             </a:r>
           </a:p>
@@ -3388,6 +3392,30 @@
           </a:graphicData>
         </a:graphic>
       </p:graphicFrame>
+      <p:sp>
+        <p:nvSpPr>
+          <p:cNvPr id="4" name="TextBox 3"/>
+          <p:cNvSpPr txBox="1"/>
+          <p:nvPr/>
+        </p:nvSpPr>
+        <p:spPr>
+          <a:xfrm>
+            <a:off x="457200" y="182880"/>
+            <a:ext cx="4572000" cy="914400"/>
+          </a:xfrm>
+          <a:prstGeom prst="rect">
+            <a:avLst/>
+          </a:prstGeom>
+          <a:noFill/>
+        </p:spPr>
+        <p:txBody>
+          <a:bodyPr wrap="none">
+            <a:spAutoFit/>
+          </a:bodyPr>
+          <a:lstStyle/>
+          <a:p/>
+        </p:txBody>
+      </p:sp>
     </p:spTree>
   </p:cSld>
   <p:clrMapOvr>
@@ -3422,7 +3450,10 @@
           <a:lstStyle/>
           <a:p>
             <a:r>
-              <a:t>Discussion: Overfitting, Limitations &amp; Failures</a:t>
+              <a:rPr>
+                <a:latin typeface="Times New Roman"/>
+              </a:rPr>
+              <a:t>Project Details</a:t>
             </a:r>
           </a:p>
         </p:txBody>
@@ -3441,24 +3472,44 @@
         <p:txBody>
           <a:bodyPr/>
           <a:lstStyle/>
-          <a:p>
-            <a:r>
-              <a:t>• Overfitting: Tuning the threshold window size (50 frames) heavily to the 1LED video might overfit to its specific lighting drift.</a:t>
-            </a:r>
-          </a:p>
-          <a:p>
-            <a:r>
-              <a:t>• Data Limitations: Lack of an explicit ground_truth.csv means BER is estimated via internal consistency rather than exact bit matches.</a:t>
-            </a:r>
-          </a:p>
-          <a:p>
-            <a:r>
-              <a:t>• Complexity: Dynamic phase snapping adds O(N) lookahead searches per frame, increasing processing time compared to static sampling.</a:t>
-            </a:r>
-          </a:p>
-          <a:p>
-            <a:r>
-              <a:t>• Failure Patterns: Blurring from rapid camera motion causes missed zero-crossings, forcing the decoder to dead-reckon.</a:t>
+          <a:p/>
+          <a:p>
+            <a:pPr>
+              <a:spcAft>
+                <a:spcPts val="1400"/>
+              </a:spcAft>
+            </a:pPr>
+            <a:r>
+              <a:rPr sz="2800">
+                <a:latin typeface="Times New Roman"/>
+              </a:rPr>
+              <a:t>Name: K.Santhosh Reddy</a:t>
+            </a:r>
+          </a:p>
+          <a:p>
+            <a:pPr>
+              <a:spcAft>
+                <a:spcPts val="1400"/>
+              </a:spcAft>
+            </a:pPr>
+            <a:r>
+              <a:rPr sz="2800">
+                <a:latin typeface="Times New Roman"/>
+              </a:rPr>
+              <a:t>Cohort: 4 Batch A2</a:t>
+            </a:r>
+          </a:p>
+          <a:p>
+            <a:pPr>
+              <a:spcAft>
+                <a:spcPts val="1400"/>
+              </a:spcAft>
+            </a:pPr>
+            <a:r>
+              <a:rPr sz="2800">
+                <a:latin typeface="Times New Roman"/>
+              </a:rPr>
+              <a:t>Mentor: Mr. Vamshi</a:t>
             </a:r>
           </a:p>
         </p:txBody>
@@ -3497,6 +3548,99 @@
           <a:lstStyle/>
           <a:p>
             <a:r>
+              <a:rPr>
+                <a:latin typeface="Times New Roman"/>
+              </a:rPr>
+              <a:t>Discussion: Overfitting, Limitations &amp; Failures</a:t>
+            </a:r>
+          </a:p>
+        </p:txBody>
+      </p:sp>
+      <p:sp>
+        <p:nvSpPr>
+          <p:cNvPr id="3" name="Content Placeholder 2"/>
+          <p:cNvSpPr>
+            <a:spLocks noGrp="1"/>
+          </p:cNvSpPr>
+          <p:nvPr>
+            <p:ph idx="1"/>
+          </p:nvPr>
+        </p:nvSpPr>
+        <p:spPr/>
+        <p:txBody>
+          <a:bodyPr/>
+          <a:lstStyle/>
+          <a:p>
+            <a:r>
+              <a:rPr>
+                <a:latin typeface="Times New Roman"/>
+              </a:rPr>
+              <a:t>• Overfitting: Tuning the threshold window size (50 frames) heavily to the 1LED video might overfit to its specific lighting drift.</a:t>
+            </a:r>
+          </a:p>
+          <a:p>
+            <a:r>
+              <a:rPr>
+                <a:latin typeface="Times New Roman"/>
+              </a:rPr>
+              <a:t>• Data Limitations: Lack of an explicit ground_truth.csv means BER is estimated via internal consistency rather than exact bit matches.</a:t>
+            </a:r>
+          </a:p>
+          <a:p>
+            <a:r>
+              <a:rPr>
+                <a:latin typeface="Times New Roman"/>
+              </a:rPr>
+              <a:t>• Complexity: Dynamic phase snapping adds O(N) lookahead searches per frame, increasing processing time compared to static sampling.</a:t>
+            </a:r>
+          </a:p>
+          <a:p>
+            <a:r>
+              <a:rPr>
+                <a:latin typeface="Times New Roman"/>
+              </a:rPr>
+              <a:t>• Failure Patterns: Blurring from rapid camera motion causes missed zero-crossings, forcing the decoder to dead-reckon.</a:t>
+            </a:r>
+          </a:p>
+        </p:txBody>
+      </p:sp>
+    </p:spTree>
+  </p:cSld>
+  <p:clrMapOvr>
+    <a:masterClrMapping/>
+  </p:clrMapOvr>
+</p:sld>
+</file>
+
+<file path=ppt/slides/slide4.xml><?xml version="1.0" encoding="utf-8"?>
+<p:sld xmlns:a="http://schemas.openxmlformats.org/drawingml/2006/main" xmlns:p="http://schemas.openxmlformats.org/presentationml/2006/main" xmlns:r="http://schemas.openxmlformats.org/officeDocument/2006/relationships">
+  <p:cSld>
+    <p:spTree>
+      <p:nvGrpSpPr>
+        <p:cNvPr id="1" name=""/>
+        <p:cNvGrpSpPr/>
+        <p:nvPr/>
+      </p:nvGrpSpPr>
+      <p:grpSpPr/>
+      <p:sp>
+        <p:nvSpPr>
+          <p:cNvPr id="2" name="Title 1"/>
+          <p:cNvSpPr>
+            <a:spLocks noGrp="1"/>
+          </p:cNvSpPr>
+          <p:nvPr>
+            <p:ph type="title"/>
+          </p:nvPr>
+        </p:nvSpPr>
+        <p:spPr/>
+        <p:txBody>
+          <a:bodyPr/>
+          <a:lstStyle/>
+          <a:p>
+            <a:r>
+              <a:rPr>
+                <a:latin typeface="Times New Roman"/>
+              </a:rPr>
               <a:t>Shortlisted Candidates for Deeper Experiments</a:t>
             </a:r>
           </a:p>
@@ -3518,27 +3662,42 @@
           <a:lstStyle/>
           <a:p>
             <a:r>
+              <a:rPr>
+                <a:latin typeface="Times New Roman"/>
+              </a:rPr>
               <a:t>Candidate 1: Dynamic Sync Decoder (Adaptive Threshold + Zero-Cross Snapping)</a:t>
             </a:r>
           </a:p>
           <a:p>
             <a:r>
+              <a:rPr>
+                <a:latin typeface="Times New Roman"/>
+              </a:rPr>
               <a:t> - Rationale: Only method currently capable of extracting 10,000+ stable bits from the drifting 1LED video.</a:t>
             </a:r>
           </a:p>
           <a:p/>
           <a:p>
             <a:r>
+              <a:rPr>
+                <a:latin typeface="Times New Roman"/>
+              </a:rPr>
               <a:t>Future Enhancements for Candidate:</a:t>
             </a:r>
           </a:p>
           <a:p>
             <a:r>
+              <a:rPr>
+                <a:latin typeface="Times New Roman"/>
+              </a:rPr>
               <a:t> - Implement a Phase-Locked Loop (PLL) to handle missed zero-crossings gracefully instead of dead-reckoning.</a:t>
             </a:r>
           </a:p>
           <a:p>
             <a:r>
+              <a:rPr>
+                <a:latin typeface="Times New Roman"/>
+              </a:rPr>
               <a:t> - Test multi-channel (RGB) thresholding rather than pure grayscale intensity to improve resilience against color temperature changes.</a:t>
             </a:r>
           </a:p>
